--- a/thinqreal/fieldvoice/FieldVoice_추진보고_20260820.pptx
+++ b/thinqreal/fieldvoice/FieldVoice_추진보고_20260820.pptx
@@ -2588,7 +2588,7 @@
                 <a:ea typeface="Arial" pitchFamily="34" charset="-122"/>
                 <a:cs typeface="Arial" pitchFamily="34" charset="-120"/>
               </a:rPr>
-              <a:t>녹음 동의 절차 확정</a:t>
+              <a:t>녹음 동의 방식 승인</a:t>
             </a:r>
             <a:endParaRPr lang="en-US" sz="1350" dirty="0"/>
           </a:p>
@@ -2605,7 +2605,7 @@
                 <a:ea typeface="Arial" pitchFamily="34" charset="-122"/>
                 <a:cs typeface="Arial" pitchFamily="34" charset="-120"/>
               </a:rPr>
-              <a:t>현장 구두 고지 + 서면 1장 — 컴플라이언스 확인 경로 지정</a:t>
+              <a:t>예약 시 개인정보 동의(기존) + 현장 구두 고지 1회 — 서면 생략</a:t>
             </a:r>
             <a:endParaRPr lang="en-US" sz="1350" dirty="0"/>
           </a:p>
